--- a/artifacts/presentation/ELECTIFY_A_REAL-TIME_ELECTIVE_REGISTRATION_SYSTEM_WITH_TRANSACTIONAL_SEAT_MANAGEMENT_Project_Presentation.pptx
+++ b/artifacts/presentation/ELECTIFY_A_REAL-TIME_ELECTIVE_REGISTRATION_SYSTEM_WITH_TRANSACTIONAL_SEAT_MANAGEMENT_Project_Presentation.pptx
@@ -4631,7 +4631,7 @@
               </a:lnSpc>
             </a:pPr>
             <a:r>
-              <a:rPr sz="3200" b="0" i="0">
+              <a:rPr sz="3200" b="0" i="0" dirty="0">
                 <a:solidFill>
                   <a:srgbClr val="FFFFFF"/>
                 </a:solidFill>
@@ -4686,7 +4686,7 @@
         <p:spPr>
           <a:xfrm>
             <a:off x="548640" y="4617720"/>
-            <a:ext cx="3566160" cy="365760"/>
+            <a:ext cx="3566160" cy="307777"/>
           </a:xfrm>
           <a:prstGeom prst="rect">
             <a:avLst/>
@@ -4701,14 +4701,20 @@
           <a:p>
             <a:pPr algn="l"/>
             <a:r>
-              <a:rPr sz="2000" b="1" i="0">
+              <a:rPr lang="en-US" sz="2000" b="1" dirty="0">
                 <a:solidFill>
                   <a:srgbClr val="FFFFFF"/>
                 </a:solidFill>
                 <a:latin typeface="Calibri"/>
               </a:rPr>
-              <a:t>MATHESHWARAN R</a:t>
-            </a:r>
+              <a:t>DEVANANDA</a:t>
+            </a:r>
+            <a:endParaRPr sz="2000" b="1" i="0" dirty="0">
+              <a:solidFill>
+                <a:srgbClr val="FFFFFF"/>
+              </a:solidFill>
+              <a:latin typeface="Calibri"/>
+            </a:endParaRPr>
           </a:p>
         </p:txBody>
       </p:sp>
@@ -4721,7 +4727,7 @@
         <p:spPr>
           <a:xfrm>
             <a:off x="548640" y="4983480"/>
-            <a:ext cx="3566160" cy="292608"/>
+            <a:ext cx="3566160" cy="230832"/>
           </a:xfrm>
           <a:prstGeom prst="rect">
             <a:avLst/>
@@ -4736,14 +4742,29 @@
           <a:p>
             <a:pPr algn="l"/>
             <a:r>
-              <a:rPr sz="1500" b="0" i="0">
+              <a:rPr sz="1500" b="0" i="0" dirty="0">
                 <a:solidFill>
                   <a:srgbClr val="B9BED3"/>
                 </a:solidFill>
                 <a:latin typeface="Calibri"/>
               </a:rPr>
-              <a:t>Register No. RA2532241010311</a:t>
-            </a:r>
+              <a:t>Register No. RA25322410103</a:t>
+            </a:r>
+            <a:r>
+              <a:rPr lang="en-US" sz="1500" b="0" i="0" dirty="0">
+                <a:solidFill>
+                  <a:srgbClr val="B9BED3"/>
+                </a:solidFill>
+                <a:latin typeface="Calibri"/>
+              </a:rPr>
+              <a:t>32</a:t>
+            </a:r>
+            <a:endParaRPr sz="1500" b="0" i="0" dirty="0">
+              <a:solidFill>
+                <a:srgbClr val="B9BED3"/>
+              </a:solidFill>
+              <a:latin typeface="Calibri"/>
+            </a:endParaRPr>
           </a:p>
         </p:txBody>
       </p:sp>
@@ -4771,7 +4792,7 @@
           <a:p>
             <a:pPr algn="l"/>
             <a:r>
-              <a:rPr sz="1100" b="1" i="0">
+              <a:rPr sz="1100" b="1" i="0" dirty="0">
                 <a:solidFill>
                   <a:srgbClr val="B9BED3"/>
                 </a:solidFill>
@@ -17837,7 +17858,7 @@
         <p:spPr>
           <a:xfrm>
             <a:off x="548640" y="4617720"/>
-            <a:ext cx="3566160" cy="365760"/>
+            <a:ext cx="3566160" cy="307777"/>
           </a:xfrm>
           <a:prstGeom prst="rect">
             <a:avLst/>
@@ -17852,14 +17873,20 @@
           <a:p>
             <a:pPr algn="l"/>
             <a:r>
-              <a:rPr sz="2000" b="1" i="0">
+              <a:rPr lang="en-US" sz="2000" b="1" dirty="0">
                 <a:solidFill>
                   <a:srgbClr val="FFFFFF"/>
                 </a:solidFill>
                 <a:latin typeface="Calibri"/>
               </a:rPr>
-              <a:t>MATHESHWARAN R</a:t>
-            </a:r>
+              <a:t>DEVANANDA</a:t>
+            </a:r>
+            <a:endParaRPr sz="2000" b="1" i="0" dirty="0">
+              <a:solidFill>
+                <a:srgbClr val="FFFFFF"/>
+              </a:solidFill>
+              <a:latin typeface="Calibri"/>
+            </a:endParaRPr>
           </a:p>
         </p:txBody>
       </p:sp>
@@ -17907,7 +17934,7 @@
         <p:spPr>
           <a:xfrm>
             <a:off x="4297680" y="4617720"/>
-            <a:ext cx="4206240" cy="365760"/>
+            <a:ext cx="4206240" cy="307777"/>
           </a:xfrm>
           <a:prstGeom prst="rect">
             <a:avLst/>
@@ -17922,14 +17949,29 @@
           <a:p>
             <a:pPr algn="l"/>
             <a:r>
-              <a:rPr sz="2000" b="1" i="0">
+              <a:rPr sz="2000" b="1" i="0" dirty="0">
                 <a:solidFill>
                   <a:srgbClr val="FFFFFF"/>
                 </a:solidFill>
                 <a:latin typeface="Calibri"/>
               </a:rPr>
-              <a:t>RA2532241010311</a:t>
-            </a:r>
+              <a:t>RA25322410103</a:t>
+            </a:r>
+            <a:r>
+              <a:rPr lang="en-US" sz="2000" b="1" i="0" dirty="0">
+                <a:solidFill>
+                  <a:srgbClr val="FFFFFF"/>
+                </a:solidFill>
+                <a:latin typeface="Calibri"/>
+              </a:rPr>
+              <a:t>32</a:t>
+            </a:r>
+            <a:endParaRPr sz="2000" b="1" i="0" dirty="0">
+              <a:solidFill>
+                <a:srgbClr val="FFFFFF"/>
+              </a:solidFill>
+              <a:latin typeface="Calibri"/>
+            </a:endParaRPr>
           </a:p>
         </p:txBody>
       </p:sp>
